--- a/latex/lec2/report_2412747_2.pptx
+++ b/latex/lec2/report_2412747_2.pptx
@@ -109,6 +109,11 @@
       </a:defRPr>
     </a:lvl9pPr>
   </p:defaultTextStyle>
+  <p:extLst>
+    <p:ext uri="{EFAFB233-063F-42B5-8137-9DF3F51BA10A}">
+      <p15:sldGuideLst xmlns:p15="http://schemas.microsoft.com/office/powerpoint/2012/main"/>
+    </p:ext>
+  </p:extLst>
 </p:presentation>
 </file>
 
@@ -259,7 +264,7 @@
           <a:p>
             <a:fld id="{6BB22CA0-8F15-C249-A46B-93AB632C583E}" type="datetimeFigureOut">
               <a:rPr kumimoji="1" lang="ja-JP" altLang="en-US" smtClean="0"/>
-              <a:t>2026/4/20</a:t>
+              <a:t>2026/5/1</a:t>
             </a:fld>
             <a:endParaRPr kumimoji="1" lang="ja-JP" altLang="en-US"/>
           </a:p>
@@ -489,7 +494,7 @@
           <a:p>
             <a:fld id="{6BB22CA0-8F15-C249-A46B-93AB632C583E}" type="datetimeFigureOut">
               <a:rPr kumimoji="1" lang="ja-JP" altLang="en-US" smtClean="0"/>
-              <a:t>2026/4/20</a:t>
+              <a:t>2026/5/1</a:t>
             </a:fld>
             <a:endParaRPr kumimoji="1" lang="ja-JP" altLang="en-US"/>
           </a:p>
@@ -729,7 +734,7 @@
           <a:p>
             <a:fld id="{6BB22CA0-8F15-C249-A46B-93AB632C583E}" type="datetimeFigureOut">
               <a:rPr kumimoji="1" lang="ja-JP" altLang="en-US" smtClean="0"/>
-              <a:t>2026/4/20</a:t>
+              <a:t>2026/5/1</a:t>
             </a:fld>
             <a:endParaRPr kumimoji="1" lang="ja-JP" altLang="en-US"/>
           </a:p>
@@ -959,7 +964,7 @@
           <a:p>
             <a:fld id="{6BB22CA0-8F15-C249-A46B-93AB632C583E}" type="datetimeFigureOut">
               <a:rPr kumimoji="1" lang="ja-JP" altLang="en-US" smtClean="0"/>
-              <a:t>2026/4/20</a:t>
+              <a:t>2026/5/1</a:t>
             </a:fld>
             <a:endParaRPr kumimoji="1" lang="ja-JP" altLang="en-US"/>
           </a:p>
@@ -1234,7 +1239,7 @@
           <a:p>
             <a:fld id="{6BB22CA0-8F15-C249-A46B-93AB632C583E}" type="datetimeFigureOut">
               <a:rPr kumimoji="1" lang="ja-JP" altLang="en-US" smtClean="0"/>
-              <a:t>2026/4/20</a:t>
+              <a:t>2026/5/1</a:t>
             </a:fld>
             <a:endParaRPr kumimoji="1" lang="ja-JP" altLang="en-US"/>
           </a:p>
@@ -1563,7 +1568,7 @@
           <a:p>
             <a:fld id="{6BB22CA0-8F15-C249-A46B-93AB632C583E}" type="datetimeFigureOut">
               <a:rPr kumimoji="1" lang="ja-JP" altLang="en-US" smtClean="0"/>
-              <a:t>2026/4/20</a:t>
+              <a:t>2026/5/1</a:t>
             </a:fld>
             <a:endParaRPr kumimoji="1" lang="ja-JP" altLang="en-US"/>
           </a:p>
@@ -2039,7 +2044,7 @@
           <a:p>
             <a:fld id="{6BB22CA0-8F15-C249-A46B-93AB632C583E}" type="datetimeFigureOut">
               <a:rPr kumimoji="1" lang="ja-JP" altLang="en-US" smtClean="0"/>
-              <a:t>2026/4/20</a:t>
+              <a:t>2026/5/1</a:t>
             </a:fld>
             <a:endParaRPr kumimoji="1" lang="ja-JP" altLang="en-US"/>
           </a:p>
@@ -2180,7 +2185,7 @@
           <a:p>
             <a:fld id="{6BB22CA0-8F15-C249-A46B-93AB632C583E}" type="datetimeFigureOut">
               <a:rPr kumimoji="1" lang="ja-JP" altLang="en-US" smtClean="0"/>
-              <a:t>2026/4/20</a:t>
+              <a:t>2026/5/1</a:t>
             </a:fld>
             <a:endParaRPr kumimoji="1" lang="ja-JP" altLang="en-US"/>
           </a:p>
@@ -2293,7 +2298,7 @@
           <a:p>
             <a:fld id="{6BB22CA0-8F15-C249-A46B-93AB632C583E}" type="datetimeFigureOut">
               <a:rPr kumimoji="1" lang="ja-JP" altLang="en-US" smtClean="0"/>
-              <a:t>2026/4/20</a:t>
+              <a:t>2026/5/1</a:t>
             </a:fld>
             <a:endParaRPr kumimoji="1" lang="ja-JP" altLang="en-US"/>
           </a:p>
@@ -2636,7 +2641,7 @@
           <a:p>
             <a:fld id="{6BB22CA0-8F15-C249-A46B-93AB632C583E}" type="datetimeFigureOut">
               <a:rPr kumimoji="1" lang="ja-JP" altLang="en-US" smtClean="0"/>
-              <a:t>2026/4/20</a:t>
+              <a:t>2026/5/1</a:t>
             </a:fld>
             <a:endParaRPr kumimoji="1" lang="ja-JP" altLang="en-US"/>
           </a:p>
@@ -2924,7 +2929,7 @@
           <a:p>
             <a:fld id="{6BB22CA0-8F15-C249-A46B-93AB632C583E}" type="datetimeFigureOut">
               <a:rPr kumimoji="1" lang="ja-JP" altLang="en-US" smtClean="0"/>
-              <a:t>2026/4/20</a:t>
+              <a:t>2026/5/1</a:t>
             </a:fld>
             <a:endParaRPr kumimoji="1" lang="ja-JP" altLang="en-US"/>
           </a:p>
@@ -3197,7 +3202,7 @@
           <a:p>
             <a:fld id="{6BB22CA0-8F15-C249-A46B-93AB632C583E}" type="datetimeFigureOut">
               <a:rPr kumimoji="1" lang="ja-JP" altLang="en-US" smtClean="0"/>
-              <a:t>2026/4/20</a:t>
+              <a:t>2026/5/1</a:t>
             </a:fld>
             <a:endParaRPr kumimoji="1" lang="ja-JP" altLang="en-US"/>
           </a:p>
@@ -3614,12 +3619,63 @@
           <a:chExt cx="0" cy="0"/>
         </a:xfrm>
       </p:grpSpPr>
+      <p:sp>
+        <p:nvSpPr>
+          <p:cNvPr id="4" name="テキスト ボックス 3">
+            <a:extLst>
+              <a:ext uri="{FF2B5EF4-FFF2-40B4-BE49-F238E27FC236}">
+                <a16:creationId xmlns:a16="http://schemas.microsoft.com/office/drawing/2014/main" id="{E4D2DA82-3D35-96C0-6097-B8B3C9622C92}"/>
+              </a:ext>
+            </a:extLst>
+          </p:cNvPr>
+          <p:cNvSpPr txBox="1"/>
+          <p:nvPr/>
+        </p:nvSpPr>
+        <p:spPr>
+          <a:xfrm>
+            <a:off x="4836681" y="4222750"/>
+            <a:ext cx="2518638" cy="369332"/>
+          </a:xfrm>
+          <a:prstGeom prst="rect">
+            <a:avLst/>
+          </a:prstGeom>
+          <a:noFill/>
+        </p:spPr>
+        <p:txBody>
+          <a:bodyPr wrap="none" rtlCol="0">
+            <a:spAutoFit/>
+          </a:bodyPr>
+          <a:lstStyle/>
+          <a:p>
+            <a:r>
+              <a:rPr kumimoji="1" lang="ja-JP" altLang="en-US"/>
+              <a:t>図</a:t>
+            </a:r>
+            <a:r>
+              <a:rPr kumimoji="1" lang="en-US" altLang="ja-JP" dirty="0"/>
+              <a:t>1</a:t>
+            </a:r>
+            <a:r>
+              <a:rPr kumimoji="1" lang="ja-JP" altLang="en-US"/>
+              <a:t>　問題</a:t>
+            </a:r>
+            <a:r>
+              <a:rPr kumimoji="1" lang="en-US" altLang="ja-JP" dirty="0"/>
+              <a:t>1</a:t>
+            </a:r>
+            <a:r>
+              <a:rPr kumimoji="1" lang="ja-JP" altLang="en-US"/>
+              <a:t>の実行結果</a:t>
+            </a:r>
+          </a:p>
+        </p:txBody>
+      </p:sp>
       <p:pic>
         <p:nvPicPr>
-          <p:cNvPr id="3" name="図 2">
-            <a:extLst>
-              <a:ext uri="{FF2B5EF4-FFF2-40B4-BE49-F238E27FC236}">
-                <a16:creationId xmlns:a16="http://schemas.microsoft.com/office/drawing/2014/main" id="{2641E151-6653-A190-4082-D76478376702}"/>
+          <p:cNvPr id="5" name="図 4">
+            <a:extLst>
+              <a:ext uri="{FF2B5EF4-FFF2-40B4-BE49-F238E27FC236}">
+                <a16:creationId xmlns:a16="http://schemas.microsoft.com/office/drawing/2014/main" id="{9C87E12E-D116-1D19-3ACE-930BC028CEC2}"/>
               </a:ext>
             </a:extLst>
           </p:cNvPr>
@@ -3636,65 +3692,14 @@
         </p:blipFill>
         <p:spPr>
           <a:xfrm>
-            <a:off x="4006850" y="2635250"/>
-            <a:ext cx="4178300" cy="1587500"/>
+            <a:off x="3816350" y="2609850"/>
+            <a:ext cx="4559300" cy="1612900"/>
           </a:xfrm>
           <a:prstGeom prst="rect">
             <a:avLst/>
           </a:prstGeom>
         </p:spPr>
       </p:pic>
-      <p:sp>
-        <p:nvSpPr>
-          <p:cNvPr id="4" name="テキスト ボックス 3">
-            <a:extLst>
-              <a:ext uri="{FF2B5EF4-FFF2-40B4-BE49-F238E27FC236}">
-                <a16:creationId xmlns:a16="http://schemas.microsoft.com/office/drawing/2014/main" id="{E4D2DA82-3D35-96C0-6097-B8B3C9622C92}"/>
-              </a:ext>
-            </a:extLst>
-          </p:cNvPr>
-          <p:cNvSpPr txBox="1"/>
-          <p:nvPr/>
-        </p:nvSpPr>
-        <p:spPr>
-          <a:xfrm>
-            <a:off x="4836681" y="4222750"/>
-            <a:ext cx="2518638" cy="369332"/>
-          </a:xfrm>
-          <a:prstGeom prst="rect">
-            <a:avLst/>
-          </a:prstGeom>
-          <a:noFill/>
-        </p:spPr>
-        <p:txBody>
-          <a:bodyPr wrap="none" rtlCol="0">
-            <a:spAutoFit/>
-          </a:bodyPr>
-          <a:lstStyle/>
-          <a:p>
-            <a:r>
-              <a:rPr kumimoji="1" lang="ja-JP" altLang="en-US"/>
-              <a:t>図</a:t>
-            </a:r>
-            <a:r>
-              <a:rPr kumimoji="1" lang="en-US" altLang="ja-JP" dirty="0"/>
-              <a:t>1</a:t>
-            </a:r>
-            <a:r>
-              <a:rPr kumimoji="1" lang="ja-JP" altLang="en-US"/>
-              <a:t>　問題</a:t>
-            </a:r>
-            <a:r>
-              <a:rPr kumimoji="1" lang="en-US" altLang="ja-JP" dirty="0"/>
-              <a:t>1</a:t>
-            </a:r>
-            <a:r>
-              <a:rPr kumimoji="1" lang="ja-JP" altLang="en-US"/>
-              <a:t>の実行結果</a:t>
-            </a:r>
-          </a:p>
-        </p:txBody>
-      </p:sp>
     </p:spTree>
     <p:extLst>
       <p:ext uri="{BB962C8B-B14F-4D97-AF65-F5344CB8AC3E}">
